--- a/public/FlowGuard-pitch-en.pptx
+++ b/public/FlowGuard-pitch-en.pptx
@@ -2388,7 +2388,7 @@
                 <a:ea typeface="Arial" pitchFamily="34" charset="-122"/>
                 <a:cs typeface="Arial" pitchFamily="34" charset="-120"/>
               </a:rPr>
-              <a:t>Stablecoin direct vs local fiat picked by gut feel means higher fees and higher failure rates.</a:t>
+              <a:t>Licensed overseas settlement vs local fiat picked by gut feel means higher fees and higher failure rates.</a:t>
             </a:r>
             <a:endParaRPr lang="en-US" sz="1300" dirty="0"/>
           </a:p>
@@ -3094,7 +3094,7 @@
                 <a:ea typeface="Arial" pitchFamily="34" charset="-122"/>
                 <a:cs typeface="Arial" pitchFamily="34" charset="-120"/>
               </a:rPr>
-              <a:t>Stablecoin Direct vs Local Fiat auto-ranked by risk and cost; each payout shows settlement currency → payee's local currency.</a:t>
+              <a:t>Licensed Overseas Settlement vs Local Fiat auto-ranked by risk and cost; each payout shows settlement currency → payee's local currency.</a:t>
             </a:r>
             <a:endParaRPr lang="en-US" sz="1300" dirty="0"/>
           </a:p>
@@ -3368,7 +3368,7 @@
                 <a:ea typeface="Arial" pitchFamily="34" charset="-122"/>
                 <a:cs typeface="Arial" pitchFamily="34" charset="-120"/>
               </a:rPr>
-              <a:t>Precheck → verify-with-supplier → dual approve → execute (MT103 / wallet) → payee arrival receipt → auto-reconcile, fully wired.</a:t>
+              <a:t>Precheck → verify-with-supplier → dual approve → generate settlement instruction for the licensed institution → payee arrival receipt → auto-reconcile, fully wired.</a:t>
             </a:r>
             <a:endParaRPr lang="en-US" sz="1300" dirty="0"/>
           </a:p>
@@ -5198,7 +5198,7 @@
                 <a:ea typeface="Arial" pitchFamily="34" charset="-122"/>
                 <a:cs typeface="Arial" pitchFamily="34" charset="-120"/>
               </a:rPr>
-              <a:t>Connect real stablecoin and local-fiat payout providers.</a:t>
+              <a:t>Route to licensed institutions (banks / PSPs; overseas settlement via an overseas licensed institution). Software-only: no payment licence, no fund custody, no crypto transfer.</a:t>
             </a:r>
             <a:endParaRPr lang="en-US" sz="1300" dirty="0"/>
           </a:p>
@@ -5303,7 +5303,7 @@
                 <a:ea typeface="Arial" pitchFamily="34" charset="-122"/>
                 <a:cs typeface="Arial" pitchFamily="34" charset="-120"/>
               </a:rPr>
-              <a:t>On-chain escrow</a:t>
+              <a:t>Deeper reconciliation</a:t>
             </a:r>
             <a:endParaRPr lang="en-US" sz="1600" dirty="0"/>
           </a:p>
@@ -5342,7 +5342,7 @@
                 <a:ea typeface="Arial" pitchFamily="34" charset="-122"/>
                 <a:cs typeface="Arial" pitchFamily="34" charset="-120"/>
               </a:rPr>
-              <a:t>Persist escrow to the backend and settle on real chains.</a:t>
+              <a:t>Read-only ERP/finance integrations to close the payment → reconciliation → bookkeeping loop. Settlement stays with licensed institutions.</a:t>
             </a:r>
             <a:endParaRPr lang="en-US" sz="1300" dirty="0"/>
           </a:p>
